--- a/hmi/dev/ui/us/NSPanel - US.pptx
+++ b/hmi/dev/ui/us/NSPanel - US.pptx
@@ -6,9 +6,11 @@
   </p:sldMasterIdLst>
   <p:sldIdLst>
     <p:sldId id="258" r:id="rId2"/>
-    <p:sldId id="263" r:id="rId3"/>
-    <p:sldId id="260" r:id="rId4"/>
-    <p:sldId id="262" r:id="rId5"/>
+    <p:sldId id="264" r:id="rId3"/>
+    <p:sldId id="265" r:id="rId4"/>
+    <p:sldId id="263" r:id="rId5"/>
+    <p:sldId id="260" r:id="rId6"/>
+    <p:sldId id="262" r:id="rId7"/>
   </p:sldIdLst>
   <p:sldSz cx="3048000" cy="4572000"/>
   <p:notesSz cx="6858000" cy="9144000"/>
@@ -500,7 +502,7 @@
           <a:p>
             <a:fld id="{024B8AE9-66EA-4D6A-A8A7-9C9BEADD6B50}" type="datetimeFigureOut">
               <a:rPr lang="en-SE" smtClean="0"/>
-              <a:t>2024-01-20</a:t>
+              <a:t>2026-04-05</a:t>
             </a:fld>
             <a:endParaRPr lang="en-SE"/>
           </a:p>
@@ -670,7 +672,7 @@
           <a:p>
             <a:fld id="{024B8AE9-66EA-4D6A-A8A7-9C9BEADD6B50}" type="datetimeFigureOut">
               <a:rPr lang="en-SE" smtClean="0"/>
-              <a:t>2024-01-20</a:t>
+              <a:t>2026-04-05</a:t>
             </a:fld>
             <a:endParaRPr lang="en-SE"/>
           </a:p>
@@ -850,7 +852,7 @@
           <a:p>
             <a:fld id="{024B8AE9-66EA-4D6A-A8A7-9C9BEADD6B50}" type="datetimeFigureOut">
               <a:rPr lang="en-SE" smtClean="0"/>
-              <a:t>2024-01-20</a:t>
+              <a:t>2026-04-05</a:t>
             </a:fld>
             <a:endParaRPr lang="en-SE"/>
           </a:p>
@@ -1020,7 +1022,7 @@
           <a:p>
             <a:fld id="{024B8AE9-66EA-4D6A-A8A7-9C9BEADD6B50}" type="datetimeFigureOut">
               <a:rPr lang="en-SE" smtClean="0"/>
-              <a:t>2024-01-20</a:t>
+              <a:t>2026-04-05</a:t>
             </a:fld>
             <a:endParaRPr lang="en-SE"/>
           </a:p>
@@ -1264,7 +1266,7 @@
           <a:p>
             <a:fld id="{024B8AE9-66EA-4D6A-A8A7-9C9BEADD6B50}" type="datetimeFigureOut">
               <a:rPr lang="en-SE" smtClean="0"/>
-              <a:t>2024-01-20</a:t>
+              <a:t>2026-04-05</a:t>
             </a:fld>
             <a:endParaRPr lang="en-SE"/>
           </a:p>
@@ -1496,7 +1498,7 @@
           <a:p>
             <a:fld id="{024B8AE9-66EA-4D6A-A8A7-9C9BEADD6B50}" type="datetimeFigureOut">
               <a:rPr lang="en-SE" smtClean="0"/>
-              <a:t>2024-01-20</a:t>
+              <a:t>2026-04-05</a:t>
             </a:fld>
             <a:endParaRPr lang="en-SE"/>
           </a:p>
@@ -1863,7 +1865,7 @@
           <a:p>
             <a:fld id="{024B8AE9-66EA-4D6A-A8A7-9C9BEADD6B50}" type="datetimeFigureOut">
               <a:rPr lang="en-SE" smtClean="0"/>
-              <a:t>2024-01-20</a:t>
+              <a:t>2026-04-05</a:t>
             </a:fld>
             <a:endParaRPr lang="en-SE"/>
           </a:p>
@@ -1981,7 +1983,7 @@
           <a:p>
             <a:fld id="{024B8AE9-66EA-4D6A-A8A7-9C9BEADD6B50}" type="datetimeFigureOut">
               <a:rPr lang="en-SE" smtClean="0"/>
-              <a:t>2024-01-20</a:t>
+              <a:t>2026-04-05</a:t>
             </a:fld>
             <a:endParaRPr lang="en-SE"/>
           </a:p>
@@ -2076,7 +2078,7 @@
           <a:p>
             <a:fld id="{024B8AE9-66EA-4D6A-A8A7-9C9BEADD6B50}" type="datetimeFigureOut">
               <a:rPr lang="en-SE" smtClean="0"/>
-              <a:t>2024-01-20</a:t>
+              <a:t>2026-04-05</a:t>
             </a:fld>
             <a:endParaRPr lang="en-SE"/>
           </a:p>
@@ -2353,7 +2355,7 @@
           <a:p>
             <a:fld id="{024B8AE9-66EA-4D6A-A8A7-9C9BEADD6B50}" type="datetimeFigureOut">
               <a:rPr lang="en-SE" smtClean="0"/>
-              <a:t>2024-01-20</a:t>
+              <a:t>2026-04-05</a:t>
             </a:fld>
             <a:endParaRPr lang="en-SE"/>
           </a:p>
@@ -2610,7 +2612,7 @@
           <a:p>
             <a:fld id="{024B8AE9-66EA-4D6A-A8A7-9C9BEADD6B50}" type="datetimeFigureOut">
               <a:rPr lang="en-SE" smtClean="0"/>
-              <a:t>2024-01-20</a:t>
+              <a:t>2026-04-05</a:t>
             </a:fld>
             <a:endParaRPr lang="en-SE"/>
           </a:p>
@@ -2823,7 +2825,7 @@
           <a:p>
             <a:fld id="{024B8AE9-66EA-4D6A-A8A7-9C9BEADD6B50}" type="datetimeFigureOut">
               <a:rPr lang="en-SE" smtClean="0"/>
-              <a:t>2024-01-20</a:t>
+              <a:t>2026-04-05</a:t>
             </a:fld>
             <a:endParaRPr lang="en-SE"/>
           </a:p>
@@ -3282,7 +3284,13 @@
   <p:cSld>
     <p:spTree>
       <p:nvGrpSpPr>
-        <p:cNvPr id="1" name=""/>
+        <p:cNvPr id="1" name="">
+          <a:extLst>
+            <a:ext uri="{FF2B5EF4-FFF2-40B4-BE49-F238E27FC236}">
+              <a16:creationId xmlns:a16="http://schemas.microsoft.com/office/drawing/2014/main" id="{4CA8843E-6F91-AA1C-724A-0175A819E6AE}"/>
+            </a:ext>
+          </a:extLst>
+        </p:cNvPr>
         <p:cNvGrpSpPr/>
         <p:nvPr/>
       </p:nvGrpSpPr>
@@ -3299,7 +3307,7 @@
           <p:cNvPr id="4" name="Picture 3" descr="A colorful waves on a black background&#10;&#10;Description automatically generated">
             <a:extLst>
               <a:ext uri="{FF2B5EF4-FFF2-40B4-BE49-F238E27FC236}">
-                <a16:creationId xmlns:a16="http://schemas.microsoft.com/office/drawing/2014/main" id="{F086EAF8-13C6-23DD-1547-4E35A34A1D12}"/>
+                <a16:creationId xmlns:a16="http://schemas.microsoft.com/office/drawing/2014/main" id="{C2117E2E-9266-24EC-54CC-E54A0B820180}"/>
               </a:ext>
             </a:extLst>
           </p:cNvPr>
@@ -3330,12 +3338,84 @@
           </a:prstGeom>
         </p:spPr>
       </p:pic>
+    </p:spTree>
+    <p:extLst>
+      <p:ext uri="{BB962C8B-B14F-4D97-AF65-F5344CB8AC3E}">
+        <p14:creationId xmlns:p14="http://schemas.microsoft.com/office/powerpoint/2010/main" val="1788303187"/>
+      </p:ext>
+    </p:extLst>
+  </p:cSld>
+  <p:clrMapOvr>
+    <a:masterClrMapping/>
+  </p:clrMapOvr>
+</p:sld>
+</file>
+
+<file path=ppt/slides/slide3.xml><?xml version="1.0" encoding="utf-8"?>
+<p:sld xmlns:a="http://schemas.openxmlformats.org/drawingml/2006/main" xmlns:r="http://schemas.openxmlformats.org/officeDocument/2006/relationships" xmlns:p="http://schemas.openxmlformats.org/presentationml/2006/main">
+  <p:cSld>
+    <p:spTree>
+      <p:nvGrpSpPr>
+        <p:cNvPr id="1" name="">
+          <a:extLst>
+            <a:ext uri="{FF2B5EF4-FFF2-40B4-BE49-F238E27FC236}">
+              <a16:creationId xmlns:a16="http://schemas.microsoft.com/office/drawing/2014/main" id="{C4F15645-D1A3-8AA5-C689-B5885F4B847F}"/>
+            </a:ext>
+          </a:extLst>
+        </p:cNvPr>
+        <p:cNvGrpSpPr/>
+        <p:nvPr/>
+      </p:nvGrpSpPr>
+      <p:grpSpPr>
+        <a:xfrm>
+          <a:off x="0" y="0"/>
+          <a:ext cx="0" cy="0"/>
+          <a:chOff x="0" y="0"/>
+          <a:chExt cx="0" cy="0"/>
+        </a:xfrm>
+      </p:grpSpPr>
       <p:pic>
         <p:nvPicPr>
-          <p:cNvPr id="2" name="Picture 1" descr="A circle with a rainbow colored circle&#10;&#10;Description automatically generated with medium confidence">
+          <p:cNvPr id="4" name="Picture 3" descr="A colorful waves on a black background&#10;&#10;Description automatically generated">
             <a:extLst>
               <a:ext uri="{FF2B5EF4-FFF2-40B4-BE49-F238E27FC236}">
-                <a16:creationId xmlns:a16="http://schemas.microsoft.com/office/drawing/2014/main" id="{5B63B5A7-0D5D-1A71-435F-BB635A8BA282}"/>
+                <a16:creationId xmlns:a16="http://schemas.microsoft.com/office/drawing/2014/main" id="{4B63E5E4-55E1-2C88-FC5A-3D20BFD0776C}"/>
+              </a:ext>
+            </a:extLst>
+          </p:cNvPr>
+          <p:cNvPicPr>
+            <a:picLocks noChangeAspect="1"/>
+          </p:cNvPicPr>
+          <p:nvPr/>
+        </p:nvPicPr>
+        <p:blipFill>
+          <a:blip r:embed="rId2">
+            <a:extLst>
+              <a:ext uri="{28A0092B-C50C-407E-A947-70E740481C1C}">
+                <a14:useLocalDpi xmlns:a14="http://schemas.microsoft.com/office/drawing/2010/main" val="0"/>
+              </a:ext>
+            </a:extLst>
+          </a:blip>
+          <a:stretch>
+            <a:fillRect/>
+          </a:stretch>
+        </p:blipFill>
+        <p:spPr>
+          <a:xfrm>
+            <a:off x="0" y="0"/>
+            <a:ext cx="3048000" cy="4572000"/>
+          </a:xfrm>
+          <a:prstGeom prst="rect">
+            <a:avLst/>
+          </a:prstGeom>
+        </p:spPr>
+      </p:pic>
+      <p:pic>
+        <p:nvPicPr>
+          <p:cNvPr id="3" name="Picture 2">
+            <a:extLst>
+              <a:ext uri="{FF2B5EF4-FFF2-40B4-BE49-F238E27FC236}">
+                <a16:creationId xmlns:a16="http://schemas.microsoft.com/office/drawing/2014/main" id="{B983CE1F-0627-B22B-B5D5-51E914D15AF7}"/>
               </a:ext>
             </a:extLst>
           </p:cNvPr>
@@ -3346,16 +3426,6 @@
         </p:nvPicPr>
         <p:blipFill>
           <a:blip r:embed="rId3">
-            <a:clrChange>
-              <a:clrFrom>
-                <a:srgbClr val="000000"/>
-              </a:clrFrom>
-              <a:clrTo>
-                <a:srgbClr val="000000">
-                  <a:alpha val="0"/>
-                </a:srgbClr>
-              </a:clrTo>
-            </a:clrChange>
             <a:extLst>
               <a:ext uri="{28A0092B-C50C-407E-A947-70E740481C1C}">
                 <a14:useLocalDpi xmlns:a14="http://schemas.microsoft.com/office/drawing/2010/main" val="0"/>
@@ -3368,90 +3438,129 @@
         </p:blipFill>
         <p:spPr>
           <a:xfrm>
-            <a:off x="571367" y="2560647"/>
-            <a:ext cx="1905266" cy="1905266"/>
+            <a:off x="0" y="0"/>
+            <a:ext cx="3048000" cy="4572000"/>
           </a:xfrm>
           <a:prstGeom prst="rect">
             <a:avLst/>
           </a:prstGeom>
         </p:spPr>
       </p:pic>
-      <p:pic>
-        <p:nvPicPr>
-          <p:cNvPr id="3" name="Picture 2" descr="A yellow and white gradient&#10;&#10;Description automatically generated">
+      <p:sp>
+        <p:nvSpPr>
+          <p:cNvPr id="5" name="Rectangle: Rounded Corners 4">
             <a:extLst>
               <a:ext uri="{FF2B5EF4-FFF2-40B4-BE49-F238E27FC236}">
-                <a16:creationId xmlns:a16="http://schemas.microsoft.com/office/drawing/2014/main" id="{12D5DFD8-8037-C70D-A947-3C129F0541A0}"/>
+                <a16:creationId xmlns:a16="http://schemas.microsoft.com/office/drawing/2014/main" id="{61A6FCE0-FEA0-475F-0649-AC95AE9D6587}"/>
               </a:ext>
             </a:extLst>
           </p:cNvPr>
-          <p:cNvPicPr>
-            <a:picLocks noChangeAspect="1"/>
-          </p:cNvPicPr>
+          <p:cNvSpPr/>
           <p:nvPr/>
-        </p:nvPicPr>
-        <p:blipFill>
-          <a:blip r:embed="rId4">
-            <a:extLst>
-              <a:ext uri="{28A0092B-C50C-407E-A947-70E740481C1C}">
-                <a14:useLocalDpi xmlns:a14="http://schemas.microsoft.com/office/drawing/2010/main" val="0"/>
-              </a:ext>
-            </a:extLst>
-          </a:blip>
-          <a:stretch>
-            <a:fillRect/>
-          </a:stretch>
-        </p:blipFill>
-        <p:spPr>
-          <a:xfrm>
-            <a:off x="1667008" y="322272"/>
-            <a:ext cx="809625" cy="2238375"/>
-          </a:xfrm>
-          <a:prstGeom prst="rect">
-            <a:avLst/>
+        </p:nvSpPr>
+        <p:spPr>
+          <a:xfrm>
+            <a:off x="455019" y="2566151"/>
+            <a:ext cx="2114550" cy="65882"/>
+          </a:xfrm>
+          <a:prstGeom prst="roundRect">
+            <a:avLst>
+              <a:gd name="adj" fmla="val 50000"/>
+            </a:avLst>
           </a:prstGeom>
-        </p:spPr>
-      </p:pic>
-      <p:pic>
-        <p:nvPicPr>
-          <p:cNvPr id="5" name="Picture 4" descr="A blue and white background&#10;&#10;Description automatically generated">
+          <a:ln>
+            <a:noFill/>
+          </a:ln>
+          <a:effectLst>
+            <a:softEdge rad="0"/>
+          </a:effectLst>
+        </p:spPr>
+        <p:style>
+          <a:lnRef idx="2">
+            <a:schemeClr val="accent1">
+              <a:shade val="15000"/>
+            </a:schemeClr>
+          </a:lnRef>
+          <a:fillRef idx="1">
+            <a:schemeClr val="accent1"/>
+          </a:fillRef>
+          <a:effectRef idx="0">
+            <a:schemeClr val="accent1"/>
+          </a:effectRef>
+          <a:fontRef idx="minor">
+            <a:schemeClr val="lt1"/>
+          </a:fontRef>
+        </p:style>
+        <p:txBody>
+          <a:bodyPr rtlCol="0" anchor="ctr"/>
+          <a:lstStyle/>
+          <a:p>
+            <a:pPr algn="ctr"/>
+            <a:endParaRPr lang="en-SE"/>
+          </a:p>
+        </p:txBody>
+      </p:sp>
+      <p:sp>
+        <p:nvSpPr>
+          <p:cNvPr id="6" name="Rectangle: Rounded Corners 5">
             <a:extLst>
               <a:ext uri="{FF2B5EF4-FFF2-40B4-BE49-F238E27FC236}">
-                <a16:creationId xmlns:a16="http://schemas.microsoft.com/office/drawing/2014/main" id="{ACCA1889-0EFB-DEF8-D0DF-C32205ED2ACB}"/>
+                <a16:creationId xmlns:a16="http://schemas.microsoft.com/office/drawing/2014/main" id="{9A6C4E71-1836-6660-1F8B-EE057D921EBB}"/>
               </a:ext>
             </a:extLst>
           </p:cNvPr>
-          <p:cNvPicPr>
-            <a:picLocks noChangeAspect="1"/>
-          </p:cNvPicPr>
+          <p:cNvSpPr/>
           <p:nvPr/>
-        </p:nvPicPr>
-        <p:blipFill>
-          <a:blip r:embed="rId5">
-            <a:extLst>
-              <a:ext uri="{28A0092B-C50C-407E-A947-70E740481C1C}">
-                <a14:useLocalDpi xmlns:a14="http://schemas.microsoft.com/office/drawing/2010/main" val="0"/>
-              </a:ext>
-            </a:extLst>
-          </a:blip>
-          <a:stretch>
-            <a:fillRect/>
-          </a:stretch>
-        </p:blipFill>
-        <p:spPr>
-          <a:xfrm>
-            <a:off x="584564" y="322272"/>
-            <a:ext cx="809738" cy="2238687"/>
-          </a:xfrm>
-          <a:prstGeom prst="rect">
-            <a:avLst/>
+        </p:nvSpPr>
+        <p:spPr>
+          <a:xfrm>
+            <a:off x="464543" y="2721431"/>
+            <a:ext cx="2114550" cy="65882"/>
+          </a:xfrm>
+          <a:prstGeom prst="roundRect">
+            <a:avLst>
+              <a:gd name="adj" fmla="val 50000"/>
+            </a:avLst>
           </a:prstGeom>
-        </p:spPr>
-      </p:pic>
+          <a:solidFill>
+            <a:srgbClr val="666666"/>
+          </a:solidFill>
+          <a:ln>
+            <a:noFill/>
+          </a:ln>
+          <a:effectLst>
+            <a:softEdge rad="0"/>
+          </a:effectLst>
+        </p:spPr>
+        <p:style>
+          <a:lnRef idx="2">
+            <a:schemeClr val="accent1">
+              <a:shade val="15000"/>
+            </a:schemeClr>
+          </a:lnRef>
+          <a:fillRef idx="1">
+            <a:schemeClr val="accent1"/>
+          </a:fillRef>
+          <a:effectRef idx="0">
+            <a:schemeClr val="accent1"/>
+          </a:effectRef>
+          <a:fontRef idx="minor">
+            <a:schemeClr val="lt1"/>
+          </a:fontRef>
+        </p:style>
+        <p:txBody>
+          <a:bodyPr rtlCol="0" anchor="ctr"/>
+          <a:lstStyle/>
+          <a:p>
+            <a:pPr algn="ctr"/>
+            <a:endParaRPr lang="en-SE"/>
+          </a:p>
+        </p:txBody>
+      </p:sp>
     </p:spTree>
     <p:extLst>
       <p:ext uri="{BB962C8B-B14F-4D97-AF65-F5344CB8AC3E}">
-        <p14:creationId xmlns:p14="http://schemas.microsoft.com/office/powerpoint/2010/main" val="1439606373"/>
+        <p14:creationId xmlns:p14="http://schemas.microsoft.com/office/powerpoint/2010/main" val="4260299023"/>
       </p:ext>
     </p:extLst>
   </p:cSld>
@@ -3461,7 +3570,7 @@
 </p:sld>
 </file>
 
-<file path=ppt/slides/slide3.xml><?xml version="1.0" encoding="utf-8"?>
+<file path=ppt/slides/slide4.xml><?xml version="1.0" encoding="utf-8"?>
 <p:sld xmlns:a="http://schemas.openxmlformats.org/drawingml/2006/main" xmlns:r="http://schemas.openxmlformats.org/officeDocument/2006/relationships" xmlns:p="http://schemas.openxmlformats.org/presentationml/2006/main">
   <p:cSld>
     <p:spTree>
@@ -3514,6 +3623,190 @@
           </a:prstGeom>
         </p:spPr>
       </p:pic>
+      <p:pic>
+        <p:nvPicPr>
+          <p:cNvPr id="2" name="Picture 1" descr="A circle with a rainbow colored circle&#10;&#10;Description automatically generated with medium confidence">
+            <a:extLst>
+              <a:ext uri="{FF2B5EF4-FFF2-40B4-BE49-F238E27FC236}">
+                <a16:creationId xmlns:a16="http://schemas.microsoft.com/office/drawing/2014/main" id="{5B63B5A7-0D5D-1A71-435F-BB635A8BA282}"/>
+              </a:ext>
+            </a:extLst>
+          </p:cNvPr>
+          <p:cNvPicPr>
+            <a:picLocks noChangeAspect="1"/>
+          </p:cNvPicPr>
+          <p:nvPr/>
+        </p:nvPicPr>
+        <p:blipFill>
+          <a:blip r:embed="rId3">
+            <a:clrChange>
+              <a:clrFrom>
+                <a:srgbClr val="000000"/>
+              </a:clrFrom>
+              <a:clrTo>
+                <a:srgbClr val="000000">
+                  <a:alpha val="0"/>
+                </a:srgbClr>
+              </a:clrTo>
+            </a:clrChange>
+            <a:extLst>
+              <a:ext uri="{28A0092B-C50C-407E-A947-70E740481C1C}">
+                <a14:useLocalDpi xmlns:a14="http://schemas.microsoft.com/office/drawing/2010/main" val="0"/>
+              </a:ext>
+            </a:extLst>
+          </a:blip>
+          <a:stretch>
+            <a:fillRect/>
+          </a:stretch>
+        </p:blipFill>
+        <p:spPr>
+          <a:xfrm>
+            <a:off x="571367" y="2560647"/>
+            <a:ext cx="1905266" cy="1905266"/>
+          </a:xfrm>
+          <a:prstGeom prst="rect">
+            <a:avLst/>
+          </a:prstGeom>
+        </p:spPr>
+      </p:pic>
+      <p:pic>
+        <p:nvPicPr>
+          <p:cNvPr id="3" name="Picture 2" descr="A yellow and white gradient&#10;&#10;Description automatically generated">
+            <a:extLst>
+              <a:ext uri="{FF2B5EF4-FFF2-40B4-BE49-F238E27FC236}">
+                <a16:creationId xmlns:a16="http://schemas.microsoft.com/office/drawing/2014/main" id="{12D5DFD8-8037-C70D-A947-3C129F0541A0}"/>
+              </a:ext>
+            </a:extLst>
+          </p:cNvPr>
+          <p:cNvPicPr>
+            <a:picLocks noChangeAspect="1"/>
+          </p:cNvPicPr>
+          <p:nvPr/>
+        </p:nvPicPr>
+        <p:blipFill>
+          <a:blip r:embed="rId4">
+            <a:extLst>
+              <a:ext uri="{28A0092B-C50C-407E-A947-70E740481C1C}">
+                <a14:useLocalDpi xmlns:a14="http://schemas.microsoft.com/office/drawing/2010/main" val="0"/>
+              </a:ext>
+            </a:extLst>
+          </a:blip>
+          <a:stretch>
+            <a:fillRect/>
+          </a:stretch>
+        </p:blipFill>
+        <p:spPr>
+          <a:xfrm>
+            <a:off x="1667008" y="322272"/>
+            <a:ext cx="809625" cy="2238375"/>
+          </a:xfrm>
+          <a:prstGeom prst="rect">
+            <a:avLst/>
+          </a:prstGeom>
+        </p:spPr>
+      </p:pic>
+      <p:pic>
+        <p:nvPicPr>
+          <p:cNvPr id="5" name="Picture 4" descr="A blue and white background&#10;&#10;Description automatically generated">
+            <a:extLst>
+              <a:ext uri="{FF2B5EF4-FFF2-40B4-BE49-F238E27FC236}">
+                <a16:creationId xmlns:a16="http://schemas.microsoft.com/office/drawing/2014/main" id="{ACCA1889-0EFB-DEF8-D0DF-C32205ED2ACB}"/>
+              </a:ext>
+            </a:extLst>
+          </p:cNvPr>
+          <p:cNvPicPr>
+            <a:picLocks noChangeAspect="1"/>
+          </p:cNvPicPr>
+          <p:nvPr/>
+        </p:nvPicPr>
+        <p:blipFill>
+          <a:blip r:embed="rId5">
+            <a:extLst>
+              <a:ext uri="{28A0092B-C50C-407E-A947-70E740481C1C}">
+                <a14:useLocalDpi xmlns:a14="http://schemas.microsoft.com/office/drawing/2010/main" val="0"/>
+              </a:ext>
+            </a:extLst>
+          </a:blip>
+          <a:stretch>
+            <a:fillRect/>
+          </a:stretch>
+        </p:blipFill>
+        <p:spPr>
+          <a:xfrm>
+            <a:off x="584564" y="322272"/>
+            <a:ext cx="809738" cy="2238687"/>
+          </a:xfrm>
+          <a:prstGeom prst="rect">
+            <a:avLst/>
+          </a:prstGeom>
+        </p:spPr>
+      </p:pic>
+    </p:spTree>
+    <p:extLst>
+      <p:ext uri="{BB962C8B-B14F-4D97-AF65-F5344CB8AC3E}">
+        <p14:creationId xmlns:p14="http://schemas.microsoft.com/office/powerpoint/2010/main" val="1439606373"/>
+      </p:ext>
+    </p:extLst>
+  </p:cSld>
+  <p:clrMapOvr>
+    <a:masterClrMapping/>
+  </p:clrMapOvr>
+</p:sld>
+</file>
+
+<file path=ppt/slides/slide5.xml><?xml version="1.0" encoding="utf-8"?>
+<p:sld xmlns:a="http://schemas.openxmlformats.org/drawingml/2006/main" xmlns:r="http://schemas.openxmlformats.org/officeDocument/2006/relationships" xmlns:p="http://schemas.openxmlformats.org/presentationml/2006/main">
+  <p:cSld>
+    <p:spTree>
+      <p:nvGrpSpPr>
+        <p:cNvPr id="1" name=""/>
+        <p:cNvGrpSpPr/>
+        <p:nvPr/>
+      </p:nvGrpSpPr>
+      <p:grpSpPr>
+        <a:xfrm>
+          <a:off x="0" y="0"/>
+          <a:ext cx="0" cy="0"/>
+          <a:chOff x="0" y="0"/>
+          <a:chExt cx="0" cy="0"/>
+        </a:xfrm>
+      </p:grpSpPr>
+      <p:pic>
+        <p:nvPicPr>
+          <p:cNvPr id="4" name="Picture 3" descr="A colorful waves on a black background&#10;&#10;Description automatically generated">
+            <a:extLst>
+              <a:ext uri="{FF2B5EF4-FFF2-40B4-BE49-F238E27FC236}">
+                <a16:creationId xmlns:a16="http://schemas.microsoft.com/office/drawing/2014/main" id="{F086EAF8-13C6-23DD-1547-4E35A34A1D12}"/>
+              </a:ext>
+            </a:extLst>
+          </p:cNvPr>
+          <p:cNvPicPr>
+            <a:picLocks noChangeAspect="1"/>
+          </p:cNvPicPr>
+          <p:nvPr/>
+        </p:nvPicPr>
+        <p:blipFill>
+          <a:blip r:embed="rId2">
+            <a:extLst>
+              <a:ext uri="{28A0092B-C50C-407E-A947-70E740481C1C}">
+                <a14:useLocalDpi xmlns:a14="http://schemas.microsoft.com/office/drawing/2010/main" val="0"/>
+              </a:ext>
+            </a:extLst>
+          </a:blip>
+          <a:stretch>
+            <a:fillRect/>
+          </a:stretch>
+        </p:blipFill>
+        <p:spPr>
+          <a:xfrm>
+            <a:off x="0" y="0"/>
+            <a:ext cx="3048000" cy="4572000"/>
+          </a:xfrm>
+          <a:prstGeom prst="rect">
+            <a:avLst/>
+          </a:prstGeom>
+        </p:spPr>
+      </p:pic>
       <p:sp>
         <p:nvSpPr>
           <p:cNvPr id="2" name="Rectangle: Rounded Corners 1">
@@ -3943,7 +4236,7 @@
 </p:sld>
 </file>
 
-<file path=ppt/slides/slide4.xml><?xml version="1.0" encoding="utf-8"?>
+<file path=ppt/slides/slide6.xml><?xml version="1.0" encoding="utf-8"?>
 <p:sld xmlns:a="http://schemas.openxmlformats.org/drawingml/2006/main" xmlns:r="http://schemas.openxmlformats.org/officeDocument/2006/relationships" xmlns:p="http://schemas.openxmlformats.org/presentationml/2006/main">
   <p:cSld>
     <p:spTree>
